--- a/PostgresSql.pptx
+++ b/PostgresSql.pptx
@@ -7,7 +7,8 @@
   <p:sldIdLst>
     <p:sldId id="257" r:id="rId2"/>
     <p:sldId id="259" r:id="rId3"/>
-    <p:sldId id="258" r:id="rId4"/>
+    <p:sldId id="260" r:id="rId4"/>
+    <p:sldId id="258" r:id="rId5"/>
   </p:sldIdLst>
   <p:sldSz cx="12192000" cy="6858000"/>
   <p:notesSz cx="6858000" cy="9144000"/>
@@ -106,6 +107,11 @@
       </a:defRPr>
     </a:lvl9pPr>
   </p:defaultTextStyle>
+  <p:extLst>
+    <p:ext uri="{EFAFB233-063F-42B5-8137-9DF3F51BA10A}">
+      <p15:sldGuideLst xmlns:p15="http://schemas.microsoft.com/office/powerpoint/2012/main"/>
+    </p:ext>
+  </p:extLst>
 </p:presentation>
 </file>
 
@@ -258,7 +264,7 @@
           <a:p>
             <a:fld id="{045E822C-023C-457B-BE59-79AB70E1245C}" type="datetimeFigureOut">
               <a:rPr lang="en-IN" smtClean="0"/>
-              <a:t>15-07-2024</a:t>
+              <a:t>29-04-2025</a:t>
             </a:fld>
             <a:endParaRPr lang="en-IN"/>
           </a:p>
@@ -458,7 +464,7 @@
           <a:p>
             <a:fld id="{045E822C-023C-457B-BE59-79AB70E1245C}" type="datetimeFigureOut">
               <a:rPr lang="en-IN" smtClean="0"/>
-              <a:t>15-07-2024</a:t>
+              <a:t>29-04-2025</a:t>
             </a:fld>
             <a:endParaRPr lang="en-IN"/>
           </a:p>
@@ -668,7 +674,7 @@
           <a:p>
             <a:fld id="{045E822C-023C-457B-BE59-79AB70E1245C}" type="datetimeFigureOut">
               <a:rPr lang="en-IN" smtClean="0"/>
-              <a:t>15-07-2024</a:t>
+              <a:t>29-04-2025</a:t>
             </a:fld>
             <a:endParaRPr lang="en-IN"/>
           </a:p>
@@ -868,7 +874,7 @@
           <a:p>
             <a:fld id="{045E822C-023C-457B-BE59-79AB70E1245C}" type="datetimeFigureOut">
               <a:rPr lang="en-IN" smtClean="0"/>
-              <a:t>15-07-2024</a:t>
+              <a:t>29-04-2025</a:t>
             </a:fld>
             <a:endParaRPr lang="en-IN"/>
           </a:p>
@@ -1144,7 +1150,7 @@
           <a:p>
             <a:fld id="{045E822C-023C-457B-BE59-79AB70E1245C}" type="datetimeFigureOut">
               <a:rPr lang="en-IN" smtClean="0"/>
-              <a:t>15-07-2024</a:t>
+              <a:t>29-04-2025</a:t>
             </a:fld>
             <a:endParaRPr lang="en-IN"/>
           </a:p>
@@ -1412,7 +1418,7 @@
           <a:p>
             <a:fld id="{045E822C-023C-457B-BE59-79AB70E1245C}" type="datetimeFigureOut">
               <a:rPr lang="en-IN" smtClean="0"/>
-              <a:t>15-07-2024</a:t>
+              <a:t>29-04-2025</a:t>
             </a:fld>
             <a:endParaRPr lang="en-IN"/>
           </a:p>
@@ -1827,7 +1833,7 @@
           <a:p>
             <a:fld id="{045E822C-023C-457B-BE59-79AB70E1245C}" type="datetimeFigureOut">
               <a:rPr lang="en-IN" smtClean="0"/>
-              <a:t>15-07-2024</a:t>
+              <a:t>29-04-2025</a:t>
             </a:fld>
             <a:endParaRPr lang="en-IN"/>
           </a:p>
@@ -1969,7 +1975,7 @@
           <a:p>
             <a:fld id="{045E822C-023C-457B-BE59-79AB70E1245C}" type="datetimeFigureOut">
               <a:rPr lang="en-IN" smtClean="0"/>
-              <a:t>15-07-2024</a:t>
+              <a:t>29-04-2025</a:t>
             </a:fld>
             <a:endParaRPr lang="en-IN"/>
           </a:p>
@@ -2082,7 +2088,7 @@
           <a:p>
             <a:fld id="{045E822C-023C-457B-BE59-79AB70E1245C}" type="datetimeFigureOut">
               <a:rPr lang="en-IN" smtClean="0"/>
-              <a:t>15-07-2024</a:t>
+              <a:t>29-04-2025</a:t>
             </a:fld>
             <a:endParaRPr lang="en-IN"/>
           </a:p>
@@ -2395,7 +2401,7 @@
           <a:p>
             <a:fld id="{045E822C-023C-457B-BE59-79AB70E1245C}" type="datetimeFigureOut">
               <a:rPr lang="en-IN" smtClean="0"/>
-              <a:t>15-07-2024</a:t>
+              <a:t>29-04-2025</a:t>
             </a:fld>
             <a:endParaRPr lang="en-IN"/>
           </a:p>
@@ -2684,7 +2690,7 @@
           <a:p>
             <a:fld id="{045E822C-023C-457B-BE59-79AB70E1245C}" type="datetimeFigureOut">
               <a:rPr lang="en-IN" smtClean="0"/>
-              <a:t>15-07-2024</a:t>
+              <a:t>29-04-2025</a:t>
             </a:fld>
             <a:endParaRPr lang="en-IN"/>
           </a:p>
@@ -2927,7 +2933,7 @@
           <a:p>
             <a:fld id="{045E822C-023C-457B-BE59-79AB70E1245C}" type="datetimeFigureOut">
               <a:rPr lang="en-IN" smtClean="0"/>
-              <a:t>15-07-2024</a:t>
+              <a:t>29-04-2025</a:t>
             </a:fld>
             <a:endParaRPr lang="en-IN"/>
           </a:p>
@@ -3482,6 +3488,232 @@
       </p:grpSpPr>
       <p:sp>
         <p:nvSpPr>
+          <p:cNvPr id="2" name="Title 1">
+            <a:extLst>
+              <a:ext uri="{FF2B5EF4-FFF2-40B4-BE49-F238E27FC236}">
+                <a16:creationId xmlns:a16="http://schemas.microsoft.com/office/drawing/2014/main" id="{FD0799F3-3ACA-C21A-E577-009A1992FD88}"/>
+              </a:ext>
+            </a:extLst>
+          </p:cNvPr>
+          <p:cNvSpPr>
+            <a:spLocks noGrp="1"/>
+          </p:cNvSpPr>
+          <p:nvPr>
+            <p:ph type="title"/>
+          </p:nvPr>
+        </p:nvSpPr>
+        <p:spPr>
+          <a:xfrm>
+            <a:off x="838200" y="365126"/>
+            <a:ext cx="10515600" cy="124732"/>
+          </a:xfrm>
+        </p:spPr>
+        <p:txBody>
+          <a:bodyPr>
+            <a:normAutofit fontScale="90000"/>
+          </a:bodyPr>
+          <a:lstStyle/>
+          <a:p>
+            <a:r>
+              <a:rPr lang="en-IN" dirty="0"/>
+              <a:t>Normalization</a:t>
+            </a:r>
+          </a:p>
+        </p:txBody>
+      </p:sp>
+      <p:sp>
+        <p:nvSpPr>
+          <p:cNvPr id="3" name="TextBox 2">
+            <a:extLst>
+              <a:ext uri="{FF2B5EF4-FFF2-40B4-BE49-F238E27FC236}">
+                <a16:creationId xmlns:a16="http://schemas.microsoft.com/office/drawing/2014/main" id="{CB7B2EC9-B0B6-5EF9-C827-2CD37493D0AD}"/>
+              </a:ext>
+            </a:extLst>
+          </p:cNvPr>
+          <p:cNvSpPr txBox="1"/>
+          <p:nvPr/>
+        </p:nvSpPr>
+        <p:spPr>
+          <a:xfrm>
+            <a:off x="239486" y="674915"/>
+            <a:ext cx="6411685" cy="3416320"/>
+          </a:xfrm>
+          <a:prstGeom prst="rect">
+            <a:avLst/>
+          </a:prstGeom>
+          <a:noFill/>
+        </p:spPr>
+        <p:txBody>
+          <a:bodyPr wrap="square" rtlCol="0">
+            <a:spAutoFit/>
+          </a:bodyPr>
+          <a:lstStyle/>
+          <a:p>
+            <a:r>
+              <a:rPr lang="en-US" b="1" dirty="0"/>
+              <a:t>1NF</a:t>
+            </a:r>
+            <a:r>
+              <a:rPr lang="en-US" dirty="0"/>
+              <a:t> : domain of an attribute should have only </a:t>
+            </a:r>
+            <a:r>
+              <a:rPr lang="en-US" b="1" dirty="0"/>
+              <a:t>atomic</a:t>
+            </a:r>
+            <a:r>
+              <a:rPr lang="en-US" dirty="0"/>
+              <a:t> values</a:t>
+            </a:r>
+          </a:p>
+          <a:p>
+            <a:endParaRPr lang="en-US" dirty="0"/>
+          </a:p>
+          <a:p>
+            <a:r>
+              <a:rPr lang="en-US" b="1" dirty="0"/>
+              <a:t>2NF</a:t>
+            </a:r>
+            <a:r>
+              <a:rPr lang="en-US" dirty="0"/>
+              <a:t>: 1NF + No non-prime attribute is dependent on the proper subset of any candidate key of table. i.e. No </a:t>
+            </a:r>
+            <a:r>
+              <a:rPr lang="en-US" b="1" dirty="0"/>
+              <a:t>partial dependency </a:t>
+            </a:r>
+            <a:r>
+              <a:rPr lang="en-US" dirty="0"/>
+              <a:t>on the key.</a:t>
+            </a:r>
+          </a:p>
+          <a:p>
+            <a:endParaRPr lang="en-US" dirty="0"/>
+          </a:p>
+          <a:p>
+            <a:r>
+              <a:rPr lang="en-US" b="1" dirty="0"/>
+              <a:t>3NF</a:t>
+            </a:r>
+            <a:r>
+              <a:rPr lang="en-US" dirty="0"/>
+              <a:t> : 2NF + </a:t>
+            </a:r>
+            <a:r>
+              <a:rPr lang="en-US" b="1" dirty="0"/>
+              <a:t>Transitive</a:t>
+            </a:r>
+            <a:r>
+              <a:rPr lang="en-US" dirty="0"/>
+              <a:t> functional dependency of non-prime attribute on any super key should be removed.</a:t>
+            </a:r>
+          </a:p>
+          <a:p>
+            <a:endParaRPr lang="en-US" dirty="0"/>
+          </a:p>
+          <a:p>
+            <a:endParaRPr lang="en-US" dirty="0"/>
+          </a:p>
+          <a:p>
+            <a:endParaRPr lang="en-US" dirty="0"/>
+          </a:p>
+          <a:p>
+            <a:endParaRPr lang="en-IN" dirty="0"/>
+          </a:p>
+        </p:txBody>
+      </p:sp>
+      <p:pic>
+        <p:nvPicPr>
+          <p:cNvPr id="7" name="Picture 6">
+            <a:extLst>
+              <a:ext uri="{FF2B5EF4-FFF2-40B4-BE49-F238E27FC236}">
+                <a16:creationId xmlns:a16="http://schemas.microsoft.com/office/drawing/2014/main" id="{A268BD07-E337-A5C4-97C4-7C94B81C232C}"/>
+              </a:ext>
+            </a:extLst>
+          </p:cNvPr>
+          <p:cNvPicPr>
+            <a:picLocks noChangeAspect="1"/>
+          </p:cNvPicPr>
+          <p:nvPr/>
+        </p:nvPicPr>
+        <p:blipFill>
+          <a:blip r:embed="rId2"/>
+          <a:stretch>
+            <a:fillRect/>
+          </a:stretch>
+        </p:blipFill>
+        <p:spPr>
+          <a:xfrm>
+            <a:off x="6889823" y="143122"/>
+            <a:ext cx="4724400" cy="2391307"/>
+          </a:xfrm>
+          <a:prstGeom prst="rect">
+            <a:avLst/>
+          </a:prstGeom>
+        </p:spPr>
+      </p:pic>
+      <p:pic>
+        <p:nvPicPr>
+          <p:cNvPr id="9" name="Picture 8">
+            <a:extLst>
+              <a:ext uri="{FF2B5EF4-FFF2-40B4-BE49-F238E27FC236}">
+                <a16:creationId xmlns:a16="http://schemas.microsoft.com/office/drawing/2014/main" id="{4DEFBB45-66F8-1736-5E68-51B8B0F6896D}"/>
+              </a:ext>
+            </a:extLst>
+          </p:cNvPr>
+          <p:cNvPicPr>
+            <a:picLocks noChangeAspect="1"/>
+          </p:cNvPicPr>
+          <p:nvPr/>
+        </p:nvPicPr>
+        <p:blipFill>
+          <a:blip r:embed="rId3"/>
+          <a:stretch>
+            <a:fillRect/>
+          </a:stretch>
+        </p:blipFill>
+        <p:spPr>
+          <a:xfrm>
+            <a:off x="6889823" y="2756433"/>
+            <a:ext cx="5095348" cy="3802709"/>
+          </a:xfrm>
+          <a:prstGeom prst="rect">
+            <a:avLst/>
+          </a:prstGeom>
+        </p:spPr>
+      </p:pic>
+    </p:spTree>
+    <p:extLst>
+      <p:ext uri="{BB962C8B-B14F-4D97-AF65-F5344CB8AC3E}">
+        <p14:creationId xmlns:p14="http://schemas.microsoft.com/office/powerpoint/2010/main" val="104942030"/>
+      </p:ext>
+    </p:extLst>
+  </p:cSld>
+  <p:clrMapOvr>
+    <a:masterClrMapping/>
+  </p:clrMapOvr>
+</p:sld>
+</file>
+
+<file path=ppt/slides/slide4.xml><?xml version="1.0" encoding="utf-8"?>
+<p:sld xmlns:a="http://schemas.openxmlformats.org/drawingml/2006/main" xmlns:r="http://schemas.openxmlformats.org/officeDocument/2006/relationships" xmlns:p="http://schemas.openxmlformats.org/presentationml/2006/main">
+  <p:cSld>
+    <p:spTree>
+      <p:nvGrpSpPr>
+        <p:cNvPr id="1" name=""/>
+        <p:cNvGrpSpPr/>
+        <p:nvPr/>
+      </p:nvGrpSpPr>
+      <p:grpSpPr>
+        <a:xfrm>
+          <a:off x="0" y="0"/>
+          <a:ext cx="0" cy="0"/>
+          <a:chOff x="0" y="0"/>
+          <a:chExt cx="0" cy="0"/>
+        </a:xfrm>
+      </p:grpSpPr>
+      <p:sp>
+        <p:nvSpPr>
           <p:cNvPr id="2" name="TextBox 1">
             <a:extLst>
               <a:ext uri="{FF2B5EF4-FFF2-40B4-BE49-F238E27FC236}">
